--- a/songs/song-54/song.pptx
+++ b/songs/song-54/song.pptx
@@ -5,11 +5,12 @@
     <p:sldMasterId id="2147483695" r:id="rId1"/>
   </p:sldMasterIdLst>
   <p:sldIdLst>
-    <p:sldId id="256" r:id="rId56"/>
-    <p:sldId id="257" r:id="rId57"/>
-    <p:sldId id="258" r:id="rId58"/>
-    <p:sldId id="259" r:id="rId59"/>
-    <p:sldId id="260" r:id="rId60"/>
+    <p:sldId id="256" r:id="rId2"/>
+    <p:sldId id="257" r:id="rId3"/>
+    <p:sldId id="258" r:id="rId4"/>
+    <p:sldId id="259" r:id="rId5"/>
+    <p:sldId id="260" r:id="rId6"/>
+    <p:sldId id="261" r:id="rId7"/>
   </p:sldIdLst>
   <p:sldSz cx="12192000" cy="6858000"/>
   <p:notesSz cx="6858000" cy="9144000"/>
@@ -268,7 +269,7 @@
               <a:pPr lvl="0">
                 <a:defRPr/>
               </a:pPr>
-              <a:t>2026. 6. 19.</a:t>
+              <a:t>2026. 9. 13.</a:t>
             </a:fld>
             <a:endParaRPr lang="ko-KR" altLang="en-US"/>
           </a:p>
@@ -460,7 +461,7 @@
               <a:pPr lvl="0">
                 <a:defRPr/>
               </a:pPr>
-              <a:t>2026. 6. 19.</a:t>
+              <a:t>2026. 9. 13.</a:t>
             </a:fld>
             <a:endParaRPr lang="ko-KR" altLang="en-US"/>
           </a:p>
@@ -662,7 +663,7 @@
               <a:pPr lvl="0">
                 <a:defRPr/>
               </a:pPr>
-              <a:t>2026. 6. 19.</a:t>
+              <a:t>2026. 9. 13.</a:t>
             </a:fld>
             <a:endParaRPr lang="ko-KR" altLang="en-US"/>
           </a:p>
@@ -862,7 +863,7 @@
               <a:pPr lvl="0">
                 <a:defRPr/>
               </a:pPr>
-              <a:t>2026. 6. 19.</a:t>
+              <a:t>2026. 9. 13.</a:t>
             </a:fld>
             <a:endParaRPr lang="ko-KR" altLang="en-US"/>
           </a:p>
@@ -1123,7 +1124,7 @@
               <a:pPr lvl="0">
                 <a:defRPr/>
               </a:pPr>
-              <a:t>2026. 6. 19.</a:t>
+              <a:t>2026. 9. 13.</a:t>
             </a:fld>
             <a:endParaRPr lang="ko-KR" altLang="en-US"/>
           </a:p>
@@ -1386,7 +1387,7 @@
               <a:pPr lvl="0">
                 <a:defRPr/>
               </a:pPr>
-              <a:t>2026. 6. 19.</a:t>
+              <a:t>2026. 9. 13.</a:t>
             </a:fld>
             <a:endParaRPr lang="ko-KR" altLang="en-US"/>
           </a:p>
@@ -1788,7 +1789,7 @@
               <a:pPr lvl="0">
                 <a:defRPr/>
               </a:pPr>
-              <a:t>2026. 6. 19.</a:t>
+              <a:t>2026. 9. 13.</a:t>
             </a:fld>
             <a:endParaRPr lang="ko-KR" altLang="en-US"/>
           </a:p>
@@ -1919,7 +1920,7 @@
               <a:pPr lvl="0">
                 <a:defRPr/>
               </a:pPr>
-              <a:t>2026. 6. 19.</a:t>
+              <a:t>2026. 9. 13.</a:t>
             </a:fld>
             <a:endParaRPr lang="ko-KR" altLang="en-US"/>
           </a:p>
@@ -2025,7 +2026,7 @@
               <a:pPr lvl="0">
                 <a:defRPr/>
               </a:pPr>
-              <a:t>2026. 6. 19.</a:t>
+              <a:t>2026. 9. 13.</a:t>
             </a:fld>
             <a:endParaRPr lang="ko-KR" altLang="en-US"/>
           </a:p>
@@ -2326,7 +2327,7 @@
               <a:pPr lvl="0">
                 <a:defRPr/>
               </a:pPr>
-              <a:t>2026. 6. 19.</a:t>
+              <a:t>2026. 9. 13.</a:t>
             </a:fld>
             <a:endParaRPr lang="ko-KR" altLang="en-US"/>
           </a:p>
@@ -2597,7 +2598,7 @@
               <a:pPr lvl="0">
                 <a:defRPr/>
               </a:pPr>
-              <a:t>2026. 6. 19.</a:t>
+              <a:t>2026. 9. 13.</a:t>
             </a:fld>
             <a:endParaRPr lang="ko-KR" altLang="en-US"/>
           </a:p>
@@ -2835,7 +2836,7 @@
               <a:pPr lvl="0">
                 <a:defRPr/>
               </a:pPr>
-              <a:t>2026. 6. 19.</a:t>
+              <a:t>2026. 9. 13.</a:t>
             </a:fld>
             <a:endParaRPr lang="ko-KR" altLang="en-US"/>
           </a:p>
@@ -4320,6 +4321,282 @@
 </p:sld>
 </file>
 
+<file path=ppt/slides/slide6.xml><?xml version="1.0" encoding="utf-8"?>
+<p:sld xmlns:a="http://schemas.openxmlformats.org/drawingml/2006/main" xmlns:r="http://schemas.openxmlformats.org/officeDocument/2006/relationships" xmlns:p="http://schemas.openxmlformats.org/presentationml/2006/main">
+  <p:cSld>
+    <p:spTree>
+      <p:nvGrpSpPr>
+        <p:cNvPr id="1" name="">
+          <a:extLst>
+            <a:ext uri="{FF2B5EF4-FFF2-40B4-BE49-F238E27FC236}">
+              <a16:creationId xmlns:a16="http://schemas.microsoft.com/office/drawing/2014/main" id="{ED5948D4-B665-A644-24B2-9BCAC62C691C}"/>
+            </a:ext>
+          </a:extLst>
+        </p:cNvPr>
+        <p:cNvGrpSpPr/>
+        <p:nvPr/>
+      </p:nvGrpSpPr>
+      <p:grpSpPr>
+        <a:xfrm>
+          <a:off x="0" y="0"/>
+          <a:ext cx="0" cy="0"/>
+          <a:chOff x="0" y="0"/>
+          <a:chExt cx="0" cy="0"/>
+        </a:xfrm>
+      </p:grpSpPr>
+      <p:sp>
+        <p:nvSpPr>
+          <p:cNvPr id="2" name="TextBox 1">
+            <a:extLst>
+              <a:ext uri="{FF2B5EF4-FFF2-40B4-BE49-F238E27FC236}">
+                <a16:creationId xmlns:a16="http://schemas.microsoft.com/office/drawing/2014/main" id="{FA337155-13E0-2357-BA43-45BF0BDF69F3}"/>
+              </a:ext>
+            </a:extLst>
+          </p:cNvPr>
+          <p:cNvSpPr txBox="1"/>
+          <p:nvPr/>
+        </p:nvSpPr>
+        <p:spPr>
+          <a:xfrm>
+            <a:off x="0" y="635505"/>
+            <a:ext cx="12192000" cy="5469203"/>
+          </a:xfrm>
+          <a:prstGeom prst="rect">
+            <a:avLst/>
+          </a:prstGeom>
+          <a:noFill/>
+        </p:spPr>
+        <p:txBody>
+          <a:bodyPr wrap="square">
+            <a:noAutofit/>
+          </a:bodyPr>
+          <a:lstStyle/>
+          <a:p>
+            <a:pPr marL="0" marR="0" lvl="0" indent="0" algn="ctr" defTabSz="914400" rtl="0" eaLnBrk="1" fontAlgn="auto" latinLnBrk="1" hangingPunct="1">
+              <a:lnSpc>
+                <a:spcPct val="100000"/>
+              </a:lnSpc>
+              <a:spcBef>
+                <a:spcPts val="0"/>
+              </a:spcBef>
+              <a:spcAft>
+                <a:spcPts val="0"/>
+              </a:spcAft>
+              <a:buClrTx/>
+              <a:buSzTx/>
+              <a:buFontTx/>
+              <a:buNone/>
+              <a:tabLst/>
+              <a:defRPr/>
+            </a:pPr>
+            <a:endParaRPr lang="en-US" altLang="ko-KR" sz="6000" b="1" spc="-300" dirty="0">
+              <a:ln w="9525">
+                <a:solidFill>
+                  <a:prstClr val="black"/>
+                </a:solidFill>
+              </a:ln>
+              <a:solidFill>
+                <a:srgbClr val="FFFFFF"/>
+              </a:solidFill>
+              <a:latin typeface="휴먼모음T" panose="02030504000101010101" pitchFamily="18" charset="-127"/>
+              <a:ea typeface="휴먼모음T" panose="02030504000101010101" pitchFamily="18" charset="-127"/>
+            </a:endParaRPr>
+          </a:p>
+          <a:p>
+            <a:pPr marL="0" marR="0" lvl="0" indent="0" algn="ctr" defTabSz="914400" rtl="0" eaLnBrk="1" fontAlgn="auto" latinLnBrk="1" hangingPunct="1">
+              <a:lnSpc>
+                <a:spcPct val="100000"/>
+              </a:lnSpc>
+              <a:spcBef>
+                <a:spcPts val="0"/>
+              </a:spcBef>
+              <a:spcAft>
+                <a:spcPts val="0"/>
+              </a:spcAft>
+              <a:buClrTx/>
+              <a:buSzTx/>
+              <a:buFontTx/>
+              <a:buNone/>
+              <a:tabLst/>
+              <a:defRPr/>
+            </a:pPr>
+            <a:r>
+              <a:rPr kumimoji="0" lang="ko-KR" altLang="en-US" sz="6000" b="1" i="0" u="none" strike="noStrike" kern="1200" cap="none" spc="-300" normalizeH="0" baseline="0" noProof="0" dirty="0">
+                <a:ln w="9525">
+                  <a:solidFill>
+                    <a:prstClr val="black"/>
+                  </a:solidFill>
+                </a:ln>
+                <a:solidFill>
+                  <a:srgbClr val="FFFFFF"/>
+                </a:solidFill>
+                <a:effectLst/>
+                <a:uLnTx/>
+                <a:uFillTx/>
+                <a:latin typeface="휴먼모음T" panose="02030504000101010101" pitchFamily="18" charset="-127"/>
+                <a:ea typeface="휴먼모음T" panose="02030504000101010101" pitchFamily="18" charset="-127"/>
+                <a:cs typeface="+mn-cs"/>
+              </a:rPr>
+              <a:t>일어나라 빛을 발하라 </a:t>
+            </a:r>
+            <a:endParaRPr kumimoji="0" lang="en-US" altLang="ko-KR" sz="6000" b="1" i="0" u="none" strike="noStrike" kern="1200" cap="none" spc="-300" normalizeH="0" baseline="0" noProof="0" dirty="0">
+              <a:ln w="9525">
+                <a:solidFill>
+                  <a:prstClr val="black"/>
+                </a:solidFill>
+              </a:ln>
+              <a:solidFill>
+                <a:srgbClr val="FFFFFF"/>
+              </a:solidFill>
+              <a:effectLst/>
+              <a:uLnTx/>
+              <a:uFillTx/>
+              <a:latin typeface="휴먼모음T" panose="02030504000101010101" pitchFamily="18" charset="-127"/>
+              <a:ea typeface="휴먼모음T" panose="02030504000101010101" pitchFamily="18" charset="-127"/>
+              <a:cs typeface="+mn-cs"/>
+            </a:endParaRPr>
+          </a:p>
+          <a:p>
+            <a:pPr marL="0" marR="0" lvl="0" indent="0" algn="ctr" defTabSz="914400" rtl="0" eaLnBrk="1" fontAlgn="auto" latinLnBrk="1" hangingPunct="1">
+              <a:lnSpc>
+                <a:spcPct val="100000"/>
+              </a:lnSpc>
+              <a:spcBef>
+                <a:spcPts val="0"/>
+              </a:spcBef>
+              <a:spcAft>
+                <a:spcPts val="0"/>
+              </a:spcAft>
+              <a:buClrTx/>
+              <a:buSzTx/>
+              <a:buFontTx/>
+              <a:buNone/>
+              <a:tabLst/>
+              <a:defRPr/>
+            </a:pPr>
+            <a:r>
+              <a:rPr lang="ko-KR" altLang="en-US" sz="6000" b="1" spc="-300" dirty="0">
+                <a:ln w="9525">
+                  <a:solidFill>
+                    <a:prstClr val="black"/>
+                  </a:solidFill>
+                </a:ln>
+                <a:solidFill>
+                  <a:srgbClr val="FFFFFF"/>
+                </a:solidFill>
+                <a:latin typeface="휴먼모음T" panose="02030504000101010101" pitchFamily="18" charset="-127"/>
+                <a:ea typeface="휴먼모음T" panose="02030504000101010101" pitchFamily="18" charset="-127"/>
+              </a:rPr>
+              <a:t>만백성이 </a:t>
+            </a:r>
+            <a:r>
+              <a:rPr lang="ko-KR" altLang="en-US" sz="6000" b="1" spc="-300" dirty="0" err="1">
+                <a:ln w="9525">
+                  <a:solidFill>
+                    <a:prstClr val="black"/>
+                  </a:solidFill>
+                </a:ln>
+                <a:solidFill>
+                  <a:srgbClr val="FFFFFF"/>
+                </a:solidFill>
+                <a:latin typeface="휴먼모음T" panose="02030504000101010101" pitchFamily="18" charset="-127"/>
+                <a:ea typeface="휴먼모음T" panose="02030504000101010101" pitchFamily="18" charset="-127"/>
+              </a:rPr>
+              <a:t>자유함을</a:t>
+            </a:r>
+            <a:r>
+              <a:rPr lang="ko-KR" altLang="en-US" sz="6000" b="1" spc="-300" dirty="0">
+                <a:ln w="9525">
+                  <a:solidFill>
+                    <a:prstClr val="black"/>
+                  </a:solidFill>
+                </a:ln>
+                <a:solidFill>
+                  <a:srgbClr val="FFFFFF"/>
+                </a:solidFill>
+                <a:latin typeface="휴먼모음T" panose="02030504000101010101" pitchFamily="18" charset="-127"/>
+                <a:ea typeface="휴먼모음T" panose="02030504000101010101" pitchFamily="18" charset="-127"/>
+              </a:rPr>
+              <a:t> 얻어 </a:t>
+            </a:r>
+            <a:endParaRPr lang="en-US" altLang="ko-KR" sz="6000" b="1" spc="-300" dirty="0">
+              <a:ln w="9525">
+                <a:solidFill>
+                  <a:prstClr val="black"/>
+                </a:solidFill>
+              </a:ln>
+              <a:solidFill>
+                <a:srgbClr val="FFFFFF"/>
+              </a:solidFill>
+              <a:latin typeface="휴먼모음T" panose="02030504000101010101" pitchFamily="18" charset="-127"/>
+              <a:ea typeface="휴먼모음T" panose="02030504000101010101" pitchFamily="18" charset="-127"/>
+            </a:endParaRPr>
+          </a:p>
+          <a:p>
+            <a:pPr marL="0" marR="0" lvl="0" indent="0" algn="ctr" defTabSz="914400" rtl="0" eaLnBrk="1" fontAlgn="auto" latinLnBrk="1" hangingPunct="1">
+              <a:lnSpc>
+                <a:spcPct val="100000"/>
+              </a:lnSpc>
+              <a:spcBef>
+                <a:spcPts val="0"/>
+              </a:spcBef>
+              <a:spcAft>
+                <a:spcPts val="0"/>
+              </a:spcAft>
+              <a:buClrTx/>
+              <a:buSzTx/>
+              <a:buFontTx/>
+              <a:buNone/>
+              <a:tabLst/>
+              <a:defRPr/>
+            </a:pPr>
+            <a:r>
+              <a:rPr lang="ko-KR" altLang="en-US" sz="6000" b="1" spc="-300" dirty="0" err="1">
+                <a:ln w="9525">
+                  <a:solidFill>
+                    <a:prstClr val="black"/>
+                  </a:solidFill>
+                </a:ln>
+                <a:solidFill>
+                  <a:srgbClr val="FFFFFF"/>
+                </a:solidFill>
+                <a:latin typeface="휴먼모음T" panose="02030504000101010101" pitchFamily="18" charset="-127"/>
+                <a:ea typeface="휴먼모음T" panose="02030504000101010101" pitchFamily="18" charset="-127"/>
+              </a:rPr>
+              <a:t>기뻐하는도다</a:t>
+            </a:r>
+            <a:endParaRPr kumimoji="0" lang="en-US" altLang="ko-KR" sz="6000" b="1" i="0" u="none" strike="noStrike" kern="1200" cap="none" spc="-300" normalizeH="0" baseline="0" noProof="0" dirty="0">
+              <a:ln w="9525">
+                <a:solidFill>
+                  <a:prstClr val="black"/>
+                </a:solidFill>
+              </a:ln>
+              <a:solidFill>
+                <a:srgbClr val="FFFFFF"/>
+              </a:solidFill>
+              <a:effectLst/>
+              <a:uLnTx/>
+              <a:uFillTx/>
+              <a:latin typeface="휴먼모음T" panose="02030504000101010101" pitchFamily="18" charset="-127"/>
+              <a:ea typeface="휴먼모음T" panose="02030504000101010101" pitchFamily="18" charset="-127"/>
+              <a:cs typeface="+mn-cs"/>
+            </a:endParaRPr>
+          </a:p>
+        </p:txBody>
+      </p:sp>
+    </p:spTree>
+    <p:extLst>
+      <p:ext uri="{BB962C8B-B14F-4D97-AF65-F5344CB8AC3E}">
+        <p14:creationId xmlns:p14="http://schemas.microsoft.com/office/powerpoint/2010/main" val="3119306807"/>
+      </p:ext>
+    </p:extLst>
+  </p:cSld>
+  <p:clrMapOvr>
+    <a:masterClrMapping/>
+  </p:clrMapOvr>
+</p:sld>
+</file>
+
 <file path=ppt/theme/theme1.xml><?xml version="1.0" encoding="utf-8"?>
 <a:theme xmlns:a="http://schemas.openxmlformats.org/drawingml/2006/main" name="1_Office 테마">
   <a:themeElements>
